--- a/resources/slides/Template.pptx
+++ b/resources/slides/Template.pptx
@@ -367,7 +367,7 @@
           <a:p>
             <a:fld id="{CC015439-64B1-CE4E-8D65-9A05746CEBEF}" type="datetimeFigureOut">
               <a:rPr lang="en-US" smtClean="0"/>
-              <a:t>8/4/26</a:t>
+              <a:t>9/11/26</a:t>
             </a:fld>
             <a:endParaRPr lang="en-US"/>
           </a:p>
@@ -471,6 +471,260 @@
 </file>
 
 <file path=ppt/slideLayouts/slideLayout2.xml><?xml version="1.0" encoding="utf-8"?>
+<p:sldLayout xmlns:a="http://schemas.openxmlformats.org/drawingml/2006/main" xmlns:r="http://schemas.openxmlformats.org/officeDocument/2006/relationships" xmlns:p="http://schemas.openxmlformats.org/presentationml/2006/main" preserve="1" userDrawn="1">
+  <p:cSld name="1_Title Slide">
+    <p:spTree>
+      <p:nvGrpSpPr>
+        <p:cNvPr id="1" name=""/>
+        <p:cNvGrpSpPr/>
+        <p:nvPr/>
+      </p:nvGrpSpPr>
+      <p:grpSpPr>
+        <a:xfrm>
+          <a:off x="0" y="0"/>
+          <a:ext cx="0" cy="0"/>
+          <a:chOff x="0" y="0"/>
+          <a:chExt cx="0" cy="0"/>
+        </a:xfrm>
+      </p:grpSpPr>
+      <p:sp>
+        <p:nvSpPr>
+          <p:cNvPr id="7" name="Rectangle 6">
+            <a:extLst>
+              <a:ext uri="{FF2B5EF4-FFF2-40B4-BE49-F238E27FC236}">
+                <a16:creationId xmlns:a16="http://schemas.microsoft.com/office/drawing/2014/main" id="{A07BDD6A-1823-8EBE-4339-8BE6A00F709B}"/>
+              </a:ext>
+            </a:extLst>
+          </p:cNvPr>
+          <p:cNvSpPr/>
+          <p:nvPr userDrawn="1"/>
+        </p:nvSpPr>
+        <p:spPr>
+          <a:xfrm>
+            <a:off x="0" y="1600201"/>
+            <a:ext cx="12192000" cy="2412586"/>
+          </a:xfrm>
+          <a:prstGeom prst="rect">
+            <a:avLst/>
+          </a:prstGeom>
+          <a:solidFill>
+            <a:srgbClr val="2F5592"/>
+          </a:solidFill>
+          <a:ln>
+            <a:noFill/>
+          </a:ln>
+        </p:spPr>
+        <p:style>
+          <a:lnRef idx="2">
+            <a:schemeClr val="accent1">
+              <a:shade val="15000"/>
+            </a:schemeClr>
+          </a:lnRef>
+          <a:fillRef idx="1">
+            <a:schemeClr val="accent1"/>
+          </a:fillRef>
+          <a:effectRef idx="0">
+            <a:schemeClr val="accent1"/>
+          </a:effectRef>
+          <a:fontRef idx="minor">
+            <a:schemeClr val="lt1"/>
+          </a:fontRef>
+        </p:style>
+        <p:txBody>
+          <a:bodyPr rtlCol="0" anchor="ctr"/>
+          <a:lstStyle/>
+          <a:p>
+            <a:pPr algn="ctr"/>
+            <a:endParaRPr lang="en-US"/>
+          </a:p>
+        </p:txBody>
+      </p:sp>
+      <p:sp>
+        <p:nvSpPr>
+          <p:cNvPr id="2" name="Title 1">
+            <a:extLst>
+              <a:ext uri="{FF2B5EF4-FFF2-40B4-BE49-F238E27FC236}">
+                <a16:creationId xmlns:a16="http://schemas.microsoft.com/office/drawing/2014/main" id="{906FEA07-9D5A-E087-CD0F-85CD617F7122}"/>
+              </a:ext>
+            </a:extLst>
+          </p:cNvPr>
+          <p:cNvSpPr>
+            <a:spLocks noGrp="1"/>
+          </p:cNvSpPr>
+          <p:nvPr>
+            <p:ph type="ctrTitle"/>
+          </p:nvPr>
+        </p:nvSpPr>
+        <p:spPr>
+          <a:xfrm>
+            <a:off x="1524000" y="1625187"/>
+            <a:ext cx="9144000" cy="2387600"/>
+          </a:xfrm>
+        </p:spPr>
+        <p:txBody>
+          <a:bodyPr anchor="ctr"/>
+          <a:lstStyle>
+            <a:lvl1pPr algn="ctr">
+              <a:defRPr sz="5400"/>
+            </a:lvl1pPr>
+          </a:lstStyle>
+          <a:p>
+            <a:r>
+              <a:rPr lang="en-US" dirty="0"/>
+              <a:t>Click to edit Master title style</a:t>
+            </a:r>
+          </a:p>
+        </p:txBody>
+      </p:sp>
+      <p:sp>
+        <p:nvSpPr>
+          <p:cNvPr id="4" name="Date Placeholder 3">
+            <a:extLst>
+              <a:ext uri="{FF2B5EF4-FFF2-40B4-BE49-F238E27FC236}">
+                <a16:creationId xmlns:a16="http://schemas.microsoft.com/office/drawing/2014/main" id="{27618ECE-1E6D-F8F2-58B1-71D7BE74C0F9}"/>
+              </a:ext>
+            </a:extLst>
+          </p:cNvPr>
+          <p:cNvSpPr>
+            <a:spLocks noGrp="1"/>
+          </p:cNvSpPr>
+          <p:nvPr>
+            <p:ph type="dt" sz="half" idx="10"/>
+          </p:nvPr>
+        </p:nvSpPr>
+        <p:spPr/>
+        <p:txBody>
+          <a:bodyPr/>
+          <a:lstStyle/>
+          <a:p>
+            <a:fld id="{CC015439-64B1-CE4E-8D65-9A05746CEBEF}" type="datetimeFigureOut">
+              <a:rPr lang="en-US" smtClean="0"/>
+              <a:t>9/11/26</a:t>
+            </a:fld>
+            <a:endParaRPr lang="en-US"/>
+          </a:p>
+        </p:txBody>
+      </p:sp>
+      <p:sp>
+        <p:nvSpPr>
+          <p:cNvPr id="5" name="Footer Placeholder 4">
+            <a:extLst>
+              <a:ext uri="{FF2B5EF4-FFF2-40B4-BE49-F238E27FC236}">
+                <a16:creationId xmlns:a16="http://schemas.microsoft.com/office/drawing/2014/main" id="{B6D2AB94-E371-30E1-1464-0D57E5C45DBB}"/>
+              </a:ext>
+            </a:extLst>
+          </p:cNvPr>
+          <p:cNvSpPr>
+            <a:spLocks noGrp="1"/>
+          </p:cNvSpPr>
+          <p:nvPr>
+            <p:ph type="ftr" sz="quarter" idx="11"/>
+          </p:nvPr>
+        </p:nvSpPr>
+        <p:spPr/>
+        <p:txBody>
+          <a:bodyPr/>
+          <a:lstStyle/>
+          <a:p>
+            <a:endParaRPr lang="en-US"/>
+          </a:p>
+        </p:txBody>
+      </p:sp>
+      <p:sp>
+        <p:nvSpPr>
+          <p:cNvPr id="6" name="Slide Number Placeholder 5">
+            <a:extLst>
+              <a:ext uri="{FF2B5EF4-FFF2-40B4-BE49-F238E27FC236}">
+                <a16:creationId xmlns:a16="http://schemas.microsoft.com/office/drawing/2014/main" id="{339C57B5-7F35-E930-6BE6-D1855198237E}"/>
+              </a:ext>
+            </a:extLst>
+          </p:cNvPr>
+          <p:cNvSpPr>
+            <a:spLocks noGrp="1"/>
+          </p:cNvSpPr>
+          <p:nvPr>
+            <p:ph type="sldNum" sz="quarter" idx="12"/>
+          </p:nvPr>
+        </p:nvSpPr>
+        <p:spPr/>
+        <p:txBody>
+          <a:bodyPr/>
+          <a:lstStyle/>
+          <a:p>
+            <a:fld id="{394597B6-99AE-8F4E-8AC4-338DBFD9B0E5}" type="slidenum">
+              <a:rPr lang="en-US" smtClean="0"/>
+              <a:t>‹#›</a:t>
+            </a:fld>
+            <a:endParaRPr lang="en-US"/>
+          </a:p>
+        </p:txBody>
+      </p:sp>
+      <p:sp>
+        <p:nvSpPr>
+          <p:cNvPr id="9" name="Rectangle 8">
+            <a:extLst>
+              <a:ext uri="{FF2B5EF4-FFF2-40B4-BE49-F238E27FC236}">
+                <a16:creationId xmlns:a16="http://schemas.microsoft.com/office/drawing/2014/main" id="{061D39B3-5E5D-0F11-FC35-6F2C9B63E066}"/>
+              </a:ext>
+            </a:extLst>
+          </p:cNvPr>
+          <p:cNvSpPr/>
+          <p:nvPr userDrawn="1"/>
+        </p:nvSpPr>
+        <p:spPr>
+          <a:xfrm>
+            <a:off x="0" y="-1813"/>
+            <a:ext cx="12192000" cy="1400215"/>
+          </a:xfrm>
+          <a:prstGeom prst="rect">
+            <a:avLst/>
+          </a:prstGeom>
+          <a:solidFill>
+            <a:schemeClr val="bg1"/>
+          </a:solidFill>
+          <a:ln>
+            <a:noFill/>
+          </a:ln>
+        </p:spPr>
+        <p:style>
+          <a:lnRef idx="2">
+            <a:schemeClr val="accent1">
+              <a:shade val="15000"/>
+            </a:schemeClr>
+          </a:lnRef>
+          <a:fillRef idx="1">
+            <a:schemeClr val="accent1"/>
+          </a:fillRef>
+          <a:effectRef idx="0">
+            <a:schemeClr val="accent1"/>
+          </a:effectRef>
+          <a:fontRef idx="minor">
+            <a:schemeClr val="lt1"/>
+          </a:fontRef>
+        </p:style>
+        <p:txBody>
+          <a:bodyPr rtlCol="0" anchor="ctr"/>
+          <a:lstStyle/>
+          <a:p>
+            <a:pPr algn="ctr"/>
+            <a:endParaRPr lang="en-US"/>
+          </a:p>
+        </p:txBody>
+      </p:sp>
+    </p:spTree>
+    <p:extLst>
+      <p:ext uri="{BB962C8B-B14F-4D97-AF65-F5344CB8AC3E}">
+        <p14:creationId xmlns:p14="http://schemas.microsoft.com/office/powerpoint/2010/main" val="3727905429"/>
+      </p:ext>
+    </p:extLst>
+  </p:cSld>
+  <p:clrMapOvr>
+    <a:masterClrMapping/>
+  </p:clrMapOvr>
+</p:sldLayout>
+</file>
+
+<file path=ppt/slideLayouts/slideLayout3.xml><?xml version="1.0" encoding="utf-8"?>
 <p:sldLayout xmlns:a="http://schemas.openxmlformats.org/drawingml/2006/main" xmlns:r="http://schemas.openxmlformats.org/officeDocument/2006/relationships" xmlns:p="http://schemas.openxmlformats.org/presentationml/2006/main" type="obj" preserve="1">
   <p:cSld name="Title and Content">
     <p:spTree>
@@ -595,7 +849,7 @@
           <a:p>
             <a:fld id="{CC015439-64B1-CE4E-8D65-9A05746CEBEF}" type="datetimeFigureOut">
               <a:rPr lang="en-US" smtClean="0"/>
-              <a:t>8/4/26</a:t>
+              <a:t>9/11/26</a:t>
             </a:fld>
             <a:endParaRPr lang="en-US"/>
           </a:p>
@@ -668,7 +922,7 @@
 </p:sldLayout>
 </file>
 
-<file path=ppt/slideLayouts/slideLayout3.xml><?xml version="1.0" encoding="utf-8"?>
+<file path=ppt/slideLayouts/slideLayout4.xml><?xml version="1.0" encoding="utf-8"?>
 <p:sldLayout xmlns:a="http://schemas.openxmlformats.org/drawingml/2006/main" xmlns:r="http://schemas.openxmlformats.org/officeDocument/2006/relationships" xmlns:p="http://schemas.openxmlformats.org/presentationml/2006/main" type="twoObj" preserve="1">
   <p:cSld name="Two Content">
     <p:spTree>
@@ -860,7 +1114,7 @@
           <a:p>
             <a:fld id="{CC015439-64B1-CE4E-8D65-9A05746CEBEF}" type="datetimeFigureOut">
               <a:rPr lang="en-US" smtClean="0"/>
-              <a:t>8/4/26</a:t>
+              <a:t>9/11/26</a:t>
             </a:fld>
             <a:endParaRPr lang="en-US"/>
           </a:p>
@@ -933,7 +1187,7 @@
 </p:sldLayout>
 </file>
 
-<file path=ppt/slideLayouts/slideLayout4.xml><?xml version="1.0" encoding="utf-8"?>
+<file path=ppt/slideLayouts/slideLayout5.xml><?xml version="1.0" encoding="utf-8"?>
 <p:sldLayout xmlns:a="http://schemas.openxmlformats.org/drawingml/2006/main" xmlns:r="http://schemas.openxmlformats.org/officeDocument/2006/relationships" xmlns:p="http://schemas.openxmlformats.org/presentationml/2006/main" type="titleOnly" preserve="1">
   <p:cSld name="Title Only">
     <p:spTree>
@@ -1001,7 +1255,7 @@
           <a:p>
             <a:fld id="{CC015439-64B1-CE4E-8D65-9A05746CEBEF}" type="datetimeFigureOut">
               <a:rPr lang="en-US" smtClean="0"/>
-              <a:t>8/4/26</a:t>
+              <a:t>9/11/26</a:t>
             </a:fld>
             <a:endParaRPr lang="en-US"/>
           </a:p>
@@ -1204,7 +1458,7 @@
           <a:p>
             <a:fld id="{CC015439-64B1-CE4E-8D65-9A05746CEBEF}" type="datetimeFigureOut">
               <a:rPr lang="en-US" smtClean="0"/>
-              <a:t>8/4/26</a:t>
+              <a:t>9/11/26</a:t>
             </a:fld>
             <a:endParaRPr lang="en-US"/>
           </a:p>
@@ -1400,9 +1654,10 @@
   <p:clrMap bg1="lt1" tx1="dk1" bg2="lt2" tx2="dk2" accent1="accent1" accent2="accent2" accent3="accent3" accent4="accent4" accent5="accent5" accent6="accent6" hlink="hlink" folHlink="folHlink"/>
   <p:sldLayoutIdLst>
     <p:sldLayoutId id="2147483649" r:id="rId1"/>
-    <p:sldLayoutId id="2147483650" r:id="rId2"/>
-    <p:sldLayoutId id="2147483652" r:id="rId3"/>
-    <p:sldLayoutId id="2147483654" r:id="rId4"/>
+    <p:sldLayoutId id="2147483655" r:id="rId2"/>
+    <p:sldLayoutId id="2147483650" r:id="rId3"/>
+    <p:sldLayoutId id="2147483652" r:id="rId4"/>
+    <p:sldLayoutId id="2147483654" r:id="rId5"/>
   </p:sldLayoutIdLst>
   <p:txStyles>
     <p:titleStyle>
